--- a/semantic_model_deck.pptx
+++ b/semantic_model_deck.pptx
@@ -3733,8 +3733,8 @@
         </p:nvSpPr>
         <p:spPr>
           <a:xfrm>
-            <a:off x="548640" y="5577840"/>
-            <a:ext cx="11064240" cy="457200"/>
+            <a:off x="548640" y="5486400"/>
+            <a:ext cx="11064240" cy="658368"/>
           </a:xfrm>
           <a:prstGeom prst="rect">
             <a:avLst/>
@@ -3758,7 +3758,7 @@
                 <a:ea typeface="Calibri" pitchFamily="34" charset="-122"/>
                 <a:cs typeface="Calibri" pitchFamily="34" charset="-120"/>
               </a:rPr>
-              <a:t>Thin shared references are also why it scales — bind N sources to a reference, not N² pairwise bridges.</a:t>
+              <a:t>Scaling has two levers: thin shared references — bind N to a reference, not N² pairwise bridges — and a growing commons of published correspondences, where each settled ad hoc case spares the next.</a:t>
             </a:r>
             <a:endParaRPr lang="en-US" sz="1250" dirty="0"/>
           </a:p>

--- a/semantic_model_deck.pptx
+++ b/semantic_model_deck.pptx
@@ -7329,7 +7329,7 @@
                 <a:ea typeface="Cambria" pitchFamily="34" charset="-122"/>
                 <a:cs typeface="Cambria" pitchFamily="34" charset="-120"/>
               </a:rPr>
-              <a:t>A research activity: what it takes on, and the outcomes</a:t>
+              <a:t>A research activity — an NMRG × NMOP collaboration</a:t>
             </a:r>
             <a:endParaRPr lang="en-US" sz="2400" dirty="0"/>
           </a:p>
@@ -7343,12 +7343,12 @@
         </p:nvSpPr>
         <p:spPr>
           <a:xfrm>
-            <a:off x="548640" y="1371600"/>
-            <a:ext cx="11109960" cy="1097280"/>
+            <a:off x="548640" y="1325880"/>
+            <a:ext cx="11109960" cy="1207008"/>
           </a:xfrm>
           <a:prstGeom prst="roundRect">
             <a:avLst>
-              <a:gd name="adj" fmla="val 4167"/>
+              <a:gd name="adj" fmla="val 3788"/>
             </a:avLst>
           </a:prstGeom>
           <a:solidFill>
@@ -7370,8 +7370,8 @@
         </p:nvSpPr>
         <p:spPr>
           <a:xfrm>
-            <a:off x="868680" y="1481328"/>
-            <a:ext cx="10469880" cy="877824"/>
+            <a:off x="868680" y="1408176"/>
+            <a:ext cx="10469880" cy="1042416"/>
           </a:xfrm>
           <a:prstGeom prst="rect">
             <a:avLst/>
@@ -7385,12 +7385,12 @@
           <a:p>
             <a:pPr indent="0" marL="0">
               <a:lnSpc>
-                <a:spcPts val="1900"/>
+                <a:spcPts val="1600"/>
               </a:lnSpc>
               <a:buNone/>
             </a:pPr>
             <a:r>
-              <a:rPr lang="en-US" sz="1350" b="1" dirty="0">
+              <a:rPr lang="en-US" sz="1250" b="1" dirty="0">
                 <a:solidFill>
                   <a:srgbClr val="0E6E76"/>
                 </a:solidFill>
@@ -7402,12 +7402,12 @@
             </a:r>
             <a:pPr indent="0" marL="0">
               <a:lnSpc>
-                <a:spcPts val="1900"/>
+                <a:spcPts val="1600"/>
               </a:lnSpc>
               <a:buNone/>
             </a:pPr>
             <a:r>
-              <a:rPr lang="en-US" sz="1350" dirty="0">
+              <a:rPr lang="en-US" sz="1250" dirty="0">
                 <a:solidFill>
                   <a:srgbClr val="182635"/>
                 </a:solidFill>
@@ -7415,9 +7415,9 @@
                 <a:ea typeface="Calibri" pitchFamily="34" charset="-122"/>
                 <a:cs typeface="Calibri" pitchFamily="34" charset="-120"/>
               </a:rPr>
-              <a:t>study and support the making of semantic models per case: the process that generates and reconciles them, the thin supports worth standardizing, and the reusable pieces worth publishing — for AI-native network operations. Not a universal model.</a:t>
-            </a:r>
-            <a:endParaRPr lang="en-US" sz="1350" dirty="0"/>
+              <a:t>automate, with cognitive machines, the per-case making and reconciling of semantic models: the process, the thin supports worth standardizing, and the reusable pieces worth publishing. Automating through cognitive machines is the natural focus — though the supports it needs serve other purposes too. Not a universal model.</a:t>
+            </a:r>
+            <a:endParaRPr lang="en-US" sz="1250" dirty="0"/>
           </a:p>
         </p:txBody>
       </p:sp>
@@ -7429,12 +7429,12 @@
         </p:nvSpPr>
         <p:spPr>
           <a:xfrm>
-            <a:off x="548640" y="2743200"/>
-            <a:ext cx="5486400" cy="2880360"/>
+            <a:off x="548640" y="2761488"/>
+            <a:ext cx="5486400" cy="2670048"/>
           </a:xfrm>
           <a:prstGeom prst="roundRect">
             <a:avLst>
-              <a:gd name="adj" fmla="val 1587"/>
+              <a:gd name="adj" fmla="val 1712"/>
             </a:avLst>
           </a:prstGeom>
           <a:solidFill>
@@ -7456,8 +7456,8 @@
         </p:nvSpPr>
         <p:spPr>
           <a:xfrm>
-            <a:off x="804672" y="2907792"/>
-            <a:ext cx="5029200" cy="365760"/>
+            <a:off x="804672" y="2898648"/>
+            <a:ext cx="5029200" cy="347472"/>
           </a:xfrm>
           <a:prstGeom prst="rect">
             <a:avLst/>
@@ -7473,7 +7473,7 @@
               <a:buNone/>
             </a:pPr>
             <a:r>
-              <a:rPr lang="en-US" sz="1400" b="1" dirty="0">
+              <a:rPr lang="en-US" sz="1350" b="1" dirty="0">
                 <a:solidFill>
                   <a:srgbClr val="0E6E76"/>
                 </a:solidFill>
@@ -7483,7 +7483,7 @@
               </a:rPr>
               <a:t>What the activity takes on</a:t>
             </a:r>
-            <a:endParaRPr lang="en-US" sz="1400" dirty="0"/>
+            <a:endParaRPr lang="en-US" sz="1350" dirty="0"/>
           </a:p>
         </p:txBody>
       </p:sp>
@@ -7495,8 +7495,8 @@
         </p:nvSpPr>
         <p:spPr>
           <a:xfrm>
-            <a:off x="841248" y="3429000"/>
-            <a:ext cx="4937760" cy="2057400"/>
+            <a:off x="841248" y="3364992"/>
+            <a:ext cx="4937760" cy="1965960"/>
           </a:xfrm>
           <a:prstGeom prst="rect">
             <a:avLst/>
@@ -7510,16 +7510,16 @@
           <a:p>
             <a:pPr marL="177800" indent="-177800">
               <a:lnSpc>
-                <a:spcPts val="1500"/>
+                <a:spcPts val="1400"/>
               </a:lnSpc>
               <a:spcAft>
-                <a:spcPts val="700"/>
+                <a:spcPts val="600"/>
               </a:spcAft>
               <a:buSzPct val="100000"/>
               <a:buChar char="–"/>
             </a:pPr>
             <a:r>
-              <a:rPr lang="en-US" sz="1100" dirty="0">
+              <a:rPr lang="en-US" sz="1050" dirty="0">
                 <a:solidFill>
                   <a:srgbClr val="182635"/>
                 </a:solidFill>
@@ -7527,23 +7527,23 @@
                 <a:ea typeface="Calibri" pitchFamily="34" charset="-122"/>
                 <a:cs typeface="Calibri" pitchFamily="34" charset="-120"/>
               </a:rPr>
-              <a:t>How semantic models are generated &amp; reconciled per case — and how cognitive AI carries it</a:t>
-            </a:r>
-            <a:endParaRPr lang="en-US" sz="1100" dirty="0"/>
+              <a:t>Automating — with cognitive machines — the per-case generation &amp; reconciliation of semantic models</a:t>
+            </a:r>
+            <a:endParaRPr lang="en-US" sz="1050" dirty="0"/>
           </a:p>
           <a:p>
             <a:pPr marL="177800" indent="-177800">
               <a:lnSpc>
-                <a:spcPts val="1500"/>
+                <a:spcPts val="1400"/>
               </a:lnSpc>
               <a:spcAft>
-                <a:spcPts val="700"/>
+                <a:spcPts val="600"/>
               </a:spcAft>
               <a:buSzPct val="100000"/>
               <a:buChar char="–"/>
             </a:pPr>
             <a:r>
-              <a:rPr lang="en-US" sz="1100" dirty="0">
+              <a:rPr lang="en-US" sz="1050" dirty="0">
                 <a:solidFill>
                   <a:srgbClr val="182635"/>
                 </a:solidFill>
@@ -7551,23 +7551,23 @@
                 <a:ea typeface="Calibri" pitchFamily="34" charset="-122"/>
                 <a:cs typeface="Calibri" pitchFamily="34" charset="-120"/>
               </a:rPr>
-              <a:t>Which minimal supports are worth standardizing — references, provenance — thin and easily evolved</a:t>
-            </a:r>
-            <a:endParaRPr lang="en-US" sz="1100" dirty="0"/>
+              <a:t>Which minimal supports (reference lexicon, provenance) are worth standardizing — thin, easily evolved</a:t>
+            </a:r>
+            <a:endParaRPr lang="en-US" sz="1050" dirty="0"/>
           </a:p>
           <a:p>
             <a:pPr marL="177800" indent="-177800">
               <a:lnSpc>
-                <a:spcPts val="1500"/>
+                <a:spcPts val="1400"/>
               </a:lnSpc>
               <a:spcAft>
-                <a:spcPts val="700"/>
+                <a:spcPts val="600"/>
               </a:spcAft>
               <a:buSzPct val="100000"/>
               <a:buChar char="–"/>
             </a:pPr>
             <a:r>
-              <a:rPr lang="en-US" sz="1100" dirty="0">
+              <a:rPr lang="en-US" sz="1050" dirty="0">
                 <a:solidFill>
                   <a:srgbClr val="182635"/>
                 </a:solidFill>
@@ -7575,9 +7575,33 @@
                 <a:ea typeface="Calibri" pitchFamily="34" charset="-122"/>
                 <a:cs typeface="Calibri" pitchFamily="34" charset="-120"/>
               </a:rPr>
-              <a:t>How reusable pieces get published, found, and reused — the reference commons</a:t>
-            </a:r>
-            <a:endParaRPr lang="en-US" sz="1100" dirty="0"/>
+              <a:t>How reusable correspondences get published and reused — an accumulating commons</a:t>
+            </a:r>
+            <a:endParaRPr lang="en-US" sz="1050" dirty="0"/>
+          </a:p>
+          <a:p>
+            <a:pPr marL="177800" indent="-177800">
+              <a:lnSpc>
+                <a:spcPts val="1400"/>
+              </a:lnSpc>
+              <a:spcAft>
+                <a:spcPts val="600"/>
+              </a:spcAft>
+              <a:buSzPct val="100000"/>
+              <a:buChar char="–"/>
+            </a:pPr>
+            <a:r>
+              <a:rPr lang="en-US" sz="1050" dirty="0">
+                <a:solidFill>
+                  <a:srgbClr val="182635"/>
+                </a:solidFill>
+                <a:latin typeface="Calibri" pitchFamily="34" charset="0"/>
+                <a:ea typeface="Calibri" pitchFamily="34" charset="-122"/>
+                <a:cs typeface="Calibri" pitchFamily="34" charset="-120"/>
+              </a:rPr>
+              <a:t>How a human-in-the-loop workflow validates the automation and feeds it back</a:t>
+            </a:r>
+            <a:endParaRPr lang="en-US" sz="1050" dirty="0"/>
           </a:p>
         </p:txBody>
       </p:sp>
@@ -7589,12 +7613,12 @@
         </p:nvSpPr>
         <p:spPr>
           <a:xfrm>
-            <a:off x="6263640" y="2743200"/>
-            <a:ext cx="5486400" cy="2880360"/>
+            <a:off x="6263640" y="2761488"/>
+            <a:ext cx="5486400" cy="2670048"/>
           </a:xfrm>
           <a:prstGeom prst="roundRect">
             <a:avLst>
-              <a:gd name="adj" fmla="val 1587"/>
+              <a:gd name="adj" fmla="val 1712"/>
             </a:avLst>
           </a:prstGeom>
           <a:solidFill>
@@ -7616,8 +7640,8 @@
         </p:nvSpPr>
         <p:spPr>
           <a:xfrm>
-            <a:off x="6519672" y="2907792"/>
-            <a:ext cx="5029200" cy="365760"/>
+            <a:off x="6519672" y="2898648"/>
+            <a:ext cx="5029200" cy="347472"/>
           </a:xfrm>
           <a:prstGeom prst="rect">
             <a:avLst/>
@@ -7633,7 +7657,7 @@
               <a:buNone/>
             </a:pPr>
             <a:r>
-              <a:rPr lang="en-US" sz="1400" b="1" dirty="0">
+              <a:rPr lang="en-US" sz="1350" b="1" dirty="0">
                 <a:solidFill>
                   <a:srgbClr val="C98A2B"/>
                 </a:solidFill>
@@ -7643,7 +7667,7 @@
               </a:rPr>
               <a:t>Anticipated outcomes</a:t>
             </a:r>
-            <a:endParaRPr lang="en-US" sz="1400" dirty="0"/>
+            <a:endParaRPr lang="en-US" sz="1350" dirty="0"/>
           </a:p>
         </p:txBody>
       </p:sp>
@@ -7655,8 +7679,8 @@
         </p:nvSpPr>
         <p:spPr>
           <a:xfrm>
-            <a:off x="6556248" y="3429000"/>
-            <a:ext cx="4937760" cy="2057400"/>
+            <a:off x="6556248" y="3364992"/>
+            <a:ext cx="4937760" cy="1965960"/>
           </a:xfrm>
           <a:prstGeom prst="rect">
             <a:avLst/>
@@ -7670,16 +7694,16 @@
           <a:p>
             <a:pPr marL="177800" indent="-177800">
               <a:lnSpc>
-                <a:spcPts val="1500"/>
+                <a:spcPts val="1400"/>
               </a:lnSpc>
               <a:spcAft>
-                <a:spcPts val="700"/>
+                <a:spcPts val="600"/>
               </a:spcAft>
               <a:buSzPct val="100000"/>
               <a:buChar char="–"/>
             </a:pPr>
             <a:r>
-              <a:rPr lang="en-US" sz="1100" dirty="0">
+              <a:rPr lang="en-US" sz="1050" dirty="0">
                 <a:solidFill>
                   <a:srgbClr val="182635"/>
                 </a:solidFill>
@@ -7687,23 +7711,23 @@
                 <a:ea typeface="Calibri" pitchFamily="34" charset="-122"/>
                 <a:cs typeface="Calibri" pitchFamily="34" charset="-120"/>
               </a:rPr>
-              <a:t>A framework &amp; vocabulary for the generation / reconciliation process</a:t>
-            </a:r>
-            <a:endParaRPr lang="en-US" sz="1100" dirty="0"/>
+              <a:t>A framework &amp; vocabulary for the cognitively-automated generation / reconciliation process</a:t>
+            </a:r>
+            <a:endParaRPr lang="en-US" sz="1050" dirty="0"/>
           </a:p>
           <a:p>
             <a:pPr marL="177800" indent="-177800">
               <a:lnSpc>
-                <a:spcPts val="1500"/>
+                <a:spcPts val="1400"/>
               </a:lnSpc>
               <a:spcAft>
-                <a:spcPts val="700"/>
+                <a:spcPts val="600"/>
               </a:spcAft>
               <a:buSzPct val="100000"/>
               <a:buChar char="–"/>
             </a:pPr>
             <a:r>
-              <a:rPr lang="en-US" sz="1100" dirty="0">
+              <a:rPr lang="en-US" sz="1050" dirty="0">
                 <a:solidFill>
                   <a:srgbClr val="182635"/>
                 </a:solidFill>
@@ -7713,21 +7737,21 @@
               </a:rPr>
               <a:t>A small set of thin standardizable supports — reference lexicon, bindings, provenance conventions</a:t>
             </a:r>
-            <a:endParaRPr lang="en-US" sz="1100" dirty="0"/>
+            <a:endParaRPr lang="en-US" sz="1050" dirty="0"/>
           </a:p>
           <a:p>
             <a:pPr marL="177800" indent="-177800">
               <a:lnSpc>
-                <a:spcPts val="1500"/>
+                <a:spcPts val="1400"/>
               </a:lnSpc>
               <a:spcAft>
-                <a:spcPts val="700"/>
+                <a:spcPts val="600"/>
               </a:spcAft>
               <a:buSzPct val="100000"/>
               <a:buChar char="–"/>
             </a:pPr>
             <a:r>
-              <a:rPr lang="en-US" sz="1100" dirty="0">
+              <a:rPr lang="en-US" sz="1050" dirty="0">
                 <a:solidFill>
                   <a:srgbClr val="182635"/>
                 </a:solidFill>
@@ -7735,23 +7759,23 @@
                 <a:ea typeface="Calibri" pitchFamily="34" charset="-122"/>
                 <a:cs typeface="Calibri" pitchFamily="34" charset="-120"/>
               </a:rPr>
-              <a:t>A publish-and-reuse pattern for correspondences</a:t>
-            </a:r>
-            <a:endParaRPr lang="en-US" sz="1100" dirty="0"/>
+              <a:t>A publish-and-reuse pattern for an accumulating commons of correspondences</a:t>
+            </a:r>
+            <a:endParaRPr lang="en-US" sz="1050" dirty="0"/>
           </a:p>
           <a:p>
             <a:pPr marL="177800" indent="-177800">
               <a:lnSpc>
-                <a:spcPts val="1500"/>
+                <a:spcPts val="1400"/>
               </a:lnSpc>
               <a:spcAft>
-                <a:spcPts val="700"/>
+                <a:spcPts val="600"/>
               </a:spcAft>
               <a:buSzPct val="100000"/>
               <a:buChar char="–"/>
             </a:pPr>
             <a:r>
-              <a:rPr lang="en-US" sz="1100" dirty="0">
+              <a:rPr lang="en-US" sz="1050" dirty="0">
                 <a:solidFill>
                   <a:srgbClr val="182635"/>
                 </a:solidFill>
@@ -7759,22 +7783,49 @@
                 <a:ea typeface="Calibri" pitchFamily="34" charset="-122"/>
                 <a:cs typeface="Calibri" pitchFamily="34" charset="-120"/>
               </a:rPr>
-              <a:t>Demonstrations across the cases — NAIM, ONSEN, reconciliation, normalisation</a:t>
-            </a:r>
-            <a:endParaRPr lang="en-US" sz="1100" dirty="0"/>
-          </a:p>
-        </p:txBody>
-      </p:sp>
-      <p:sp>
-        <p:nvSpPr>
-          <p:cNvPr id="11" name="Text 9"/>
+              <a:t>A running, human-in-the-loop experiment across cases — NAIM, ONSEN, reconciliation, anomaly semantics</a:t>
+            </a:r>
+            <a:endParaRPr lang="en-US" sz="1050" dirty="0"/>
+          </a:p>
+        </p:txBody>
+      </p:sp>
+      <p:sp>
+        <p:nvSpPr>
+          <p:cNvPr id="11" name="Shape 9"/>
           <p:cNvSpPr/>
           <p:nvPr/>
         </p:nvSpPr>
         <p:spPr>
           <a:xfrm>
-            <a:off x="548640" y="5897880"/>
-            <a:ext cx="11064240" cy="365760"/>
+            <a:off x="548640" y="5742432"/>
+            <a:ext cx="11109960" cy="749808"/>
+          </a:xfrm>
+          <a:prstGeom prst="roundRect">
+            <a:avLst>
+              <a:gd name="adj" fmla="val 6098"/>
+            </a:avLst>
+          </a:prstGeom>
+          <a:solidFill>
+            <a:srgbClr val="EAF3EE"/>
+          </a:solidFill>
+          <a:ln w="16510">
+            <a:solidFill>
+              <a:srgbClr val="256B4A"/>
+            </a:solidFill>
+            <a:prstDash val="solid"/>
+          </a:ln>
+        </p:spPr>
+      </p:sp>
+      <p:sp>
+        <p:nvSpPr>
+          <p:cNvPr id="12" name="Text 10"/>
+          <p:cNvSpPr/>
+          <p:nvPr/>
+        </p:nvSpPr>
+        <p:spPr>
+          <a:xfrm>
+            <a:off x="868680" y="5806440"/>
+            <a:ext cx="10469880" cy="621792"/>
           </a:xfrm>
           <a:prstGeom prst="rect">
             <a:avLst/>
@@ -7786,27 +7837,47 @@
           <a:bodyPr wrap="square" rtlCol="0" anchor="ctr"/>
           <a:lstStyle/>
           <a:p>
-            <a:pPr algn="ctr" indent="0" marL="0">
+            <a:pPr indent="0" marL="0">
+              <a:lnSpc>
+                <a:spcPts val="1400"/>
+              </a:lnSpc>
               <a:buNone/>
             </a:pPr>
             <a:r>
-              <a:rPr lang="en-US" sz="1300" b="1" i="1" dirty="0">
+              <a:rPr lang="en-US" sz="1150" b="1" dirty="0">
                 <a:solidFill>
-                  <a:srgbClr val="0F2942"/>
+                  <a:srgbClr val="256B4A"/>
                 </a:solidFill>
                 <a:latin typeface="Calibri" pitchFamily="34" charset="0"/>
                 <a:ea typeface="Calibri" pitchFamily="34" charset="-122"/>
                 <a:cs typeface="Calibri" pitchFamily="34" charset="-120"/>
               </a:rPr>
-              <a:t>Genuinely new · network-specific · a process to support, not a model to mandate.</a:t>
-            </a:r>
-            <a:endParaRPr lang="en-US" sz="1300" dirty="0"/>
-          </a:p>
-        </p:txBody>
-      </p:sp>
-      <p:sp>
-        <p:nvSpPr>
-          <p:cNvPr id="12" name="Text 10"/>
+              <a:t>An NMRG × NMOP collaboration:  </a:t>
+            </a:r>
+            <a:pPr indent="0" marL="0">
+              <a:lnSpc>
+                <a:spcPts val="1400"/>
+              </a:lnSpc>
+              <a:buNone/>
+            </a:pPr>
+            <a:r>
+              <a:rPr lang="en-US" sz="1150" dirty="0">
+                <a:solidFill>
+                  <a:srgbClr val="182635"/>
+                </a:solidFill>
+                <a:latin typeface="Calibri" pitchFamily="34" charset="0"/>
+                <a:ea typeface="Calibri" pitchFamily="34" charset="-122"/>
+                <a:cs typeface="Calibri" pitchFamily="34" charset="-120"/>
+              </a:rPr>
+              <a:t>research proposes the ontology, lexicon and the automation; operators contribute the pragmatics — incident symptoms and postmortems — and human-in-the-loop validation.</a:t>
+            </a:r>
+            <a:endParaRPr lang="en-US" sz="1150" dirty="0"/>
+          </a:p>
+        </p:txBody>
+      </p:sp>
+      <p:sp>
+        <p:nvSpPr>
+          <p:cNvPr id="13" name="Text 11"/>
           <p:cNvSpPr/>
           <p:nvPr/>
         </p:nvSpPr>
@@ -9787,6 +9858,45 @@
       <p:sp>
         <p:nvSpPr>
           <p:cNvPr id="6" name="Text 3"/>
+          <p:cNvSpPr/>
+          <p:nvPr/>
+        </p:nvSpPr>
+        <p:spPr>
+          <a:xfrm>
+            <a:off x="548640" y="6419088"/>
+            <a:ext cx="11064240" cy="274320"/>
+          </a:xfrm>
+          <a:prstGeom prst="rect">
+            <a:avLst/>
+          </a:prstGeom>
+          <a:noFill/>
+          <a:ln/>
+        </p:spPr>
+        <p:txBody>
+          <a:bodyPr wrap="square" rtlCol="0" anchor="ctr"/>
+          <a:lstStyle/>
+          <a:p>
+            <a:pPr algn="ctr" indent="0" marL="0">
+              <a:buNone/>
+            </a:pPr>
+            <a:r>
+              <a:rPr lang="en-US" sz="850" i="1" dirty="0">
+                <a:solidFill>
+                  <a:srgbClr val="5B6B77"/>
+                </a:solidFill>
+                <a:latin typeface="Calibri" pitchFamily="34" charset="0"/>
+                <a:ea typeface="Calibri" pitchFamily="34" charset="-122"/>
+                <a:cs typeface="Calibri" pitchFamily="34" charset="-120"/>
+              </a:rPr>
+              <a:t>A further human-or-machine example: the NMOP network-anomaly lifecycle and semantics drafts — annotators human or algorithmic, validated in the loop.</a:t>
+            </a:r>
+            <a:endParaRPr lang="en-US" sz="850" dirty="0"/>
+          </a:p>
+        </p:txBody>
+      </p:sp>
+      <p:sp>
+        <p:nvSpPr>
+          <p:cNvPr id="7" name="Text 4"/>
           <p:cNvSpPr/>
           <p:nvPr/>
         </p:nvSpPr>

--- a/semantic_model_deck.pptx
+++ b/semantic_model_deck.pptx
@@ -9434,7 +9434,7 @@
                 <a:ea typeface="Calibri" pitchFamily="34" charset="-122"/>
                 <a:cs typeface="Calibri" pitchFamily="34" charset="-120"/>
               </a:rPr>
-              <a:t> captures meaning in the broad sense — its semantics and its pragmatics both (ontology, lexicon, and use), and not its form. Because it is form-independent, it can support bridging between forms, can support semantic evolution, and is needed to support machine reasoning.</a:t>
+              <a:t> captures meaning in the broad sense — its semantics and its pragmatics both (the ontology and its lexicon, and use), and not its form. Because it is form-independent, it can support bridging between forms, can support semantic evolution, and is needed to support machine reasoning.</a:t>
             </a:r>
             <a:endParaRPr lang="en-US" sz="1350" dirty="0"/>
           </a:p>
